--- a/docs/Slide14_static_pathway.pptx
+++ b/docs/Slide14_static_pathway.pptx
@@ -1901,8 +1901,8 @@
         </p:blipFill>
         <p:spPr>
           <a:xfrm>
-            <a:off x="1456152" y="2231136"/>
-            <a:ext cx="6231694" cy="2999231"/>
+            <a:off x="1476049" y="2231136"/>
+            <a:ext cx="6191901" cy="2999232"/>
           </a:xfrm>
           <a:prstGeom prst="rect">
             <a:avLst/>

--- a/docs/Slide14_static_pathway.pptx
+++ b/docs/Slide14_static_pathway.pptx
@@ -1901,8 +1901,8 @@
         </p:blipFill>
         <p:spPr>
           <a:xfrm>
-            <a:off x="1476049" y="2231136"/>
-            <a:ext cx="6191901" cy="2999232"/>
+            <a:off x="877987" y="2231136"/>
+            <a:ext cx="7388025" cy="2999232"/>
           </a:xfrm>
           <a:prstGeom prst="rect">
             <a:avLst/>

--- a/docs/Slide14_static_pathway.pptx
+++ b/docs/Slide14_static_pathway.pptx
@@ -1901,8 +1901,8 @@
         </p:blipFill>
         <p:spPr>
           <a:xfrm>
-            <a:off x="877987" y="2231136"/>
-            <a:ext cx="7388025" cy="2999232"/>
+            <a:off x="1476049" y="2231136"/>
+            <a:ext cx="6191901" cy="2999232"/>
           </a:xfrm>
           <a:prstGeom prst="rect">
             <a:avLst/>
